--- a/public/fun/pack/pptx/talk/발표템플릿_03_업무보고_교정벚나무.pptx
+++ b/public/fun/pack/pptx/talk/발표템플릿_03_업무보고_교정벚나무.pptx
@@ -3347,7 +3347,7 @@
             <a:r>
               <a:rPr sz="3600" b="1" i="0">
                 <a:solidFill>
-                  <a:srgbClr val="9E2E4A"/>
+                  <a:srgbClr val="721D32"/>
                 </a:solidFill>
               </a:rPr>
               <a:t>발표 제목을 입력하세요</a:t>
@@ -3385,7 +3385,7 @@
             <a:r>
               <a:rPr sz="1700" b="0" i="1">
                 <a:solidFill>
-                  <a:srgbClr val="9E2E4A"/>
+                  <a:srgbClr val="721D32"/>
                 </a:solidFill>
               </a:rPr>
               <a:t>이번 분기 진행 상황을 보고드립니다</a:t>
@@ -3460,7 +3460,7 @@
     <p:bg>
       <p:bgPr>
         <a:solidFill>
-          <a:srgbClr val="D1617D"/>
+          <a:srgbClr val="DB3D65"/>
         </a:solidFill>
         <a:effectLst/>
       </p:bgPr>
@@ -3533,7 +3533,7 @@
             <a:r>
               <a:rPr sz="3000" b="1" i="0">
                 <a:solidFill>
-                  <a:srgbClr val="9E2E4A"/>
+                  <a:srgbClr val="721D32"/>
                 </a:solidFill>
               </a:rPr>
               <a:t>목차</a:t>
@@ -3558,11 +3558,11 @@
             </a:avLst>
           </a:prstGeom>
           <a:solidFill>
-            <a:srgbClr val="FAEFF2"/>
+            <a:srgbClr val="FCF3F5"/>
           </a:solidFill>
           <a:ln w="12700">
             <a:solidFill>
-              <a:srgbClr val="F3CED7"/>
+              <a:srgbClr val="F7D4DD"/>
             </a:solidFill>
           </a:ln>
         </p:spPr>
@@ -3589,7 +3589,7 @@
             <a:avLst/>
           </a:prstGeom>
           <a:solidFill>
-            <a:srgbClr val="D1617D"/>
+            <a:srgbClr val="DB3D65"/>
           </a:solidFill>
           <a:ln>
             <a:noFill/>
@@ -3647,7 +3647,7 @@
             <a:r>
               <a:rPr sz="1800" b="1" i="0">
                 <a:solidFill>
-                  <a:srgbClr val="9E2E4A"/>
+                  <a:srgbClr val="721D32"/>
                 </a:solidFill>
               </a:rPr>
               <a:t>추진 경과</a:t>
@@ -3710,11 +3710,11 @@
             </a:avLst>
           </a:prstGeom>
           <a:solidFill>
-            <a:srgbClr val="FAEFF2"/>
+            <a:srgbClr val="FCF3F5"/>
           </a:solidFill>
           <a:ln w="12700">
             <a:solidFill>
-              <a:srgbClr val="F3CED7"/>
+              <a:srgbClr val="F7D4DD"/>
             </a:solidFill>
           </a:ln>
         </p:spPr>
@@ -3741,7 +3741,7 @@
             <a:avLst/>
           </a:prstGeom>
           <a:solidFill>
-            <a:srgbClr val="D1617D"/>
+            <a:srgbClr val="DB3D65"/>
           </a:solidFill>
           <a:ln>
             <a:noFill/>
@@ -3799,7 +3799,7 @@
             <a:r>
               <a:rPr sz="1800" b="1" i="0">
                 <a:solidFill>
-                  <a:srgbClr val="9E2E4A"/>
+                  <a:srgbClr val="721D32"/>
                 </a:solidFill>
               </a:rPr>
               <a:t>주요 성과</a:t>
@@ -3862,11 +3862,11 @@
             </a:avLst>
           </a:prstGeom>
           <a:solidFill>
-            <a:srgbClr val="FAEFF2"/>
+            <a:srgbClr val="FCF3F5"/>
           </a:solidFill>
           <a:ln w="12700">
             <a:solidFill>
-              <a:srgbClr val="F3CED7"/>
+              <a:srgbClr val="F7D4DD"/>
             </a:solidFill>
           </a:ln>
         </p:spPr>
@@ -3893,7 +3893,7 @@
             <a:avLst/>
           </a:prstGeom>
           <a:solidFill>
-            <a:srgbClr val="D1617D"/>
+            <a:srgbClr val="DB3D65"/>
           </a:solidFill>
           <a:ln>
             <a:noFill/>
@@ -3951,7 +3951,7 @@
             <a:r>
               <a:rPr sz="1800" b="1" i="0">
                 <a:solidFill>
-                  <a:srgbClr val="9E2E4A"/>
+                  <a:srgbClr val="721D32"/>
                 </a:solidFill>
               </a:rPr>
               <a:t>이슈와 대응</a:t>
@@ -4014,11 +4014,11 @@
             </a:avLst>
           </a:prstGeom>
           <a:solidFill>
-            <a:srgbClr val="FAEFF2"/>
+            <a:srgbClr val="FCF3F5"/>
           </a:solidFill>
           <a:ln w="12700">
             <a:solidFill>
-              <a:srgbClr val="F3CED7"/>
+              <a:srgbClr val="F7D4DD"/>
             </a:solidFill>
           </a:ln>
         </p:spPr>
@@ -4045,7 +4045,7 @@
             <a:avLst/>
           </a:prstGeom>
           <a:solidFill>
-            <a:srgbClr val="D1617D"/>
+            <a:srgbClr val="DB3D65"/>
           </a:solidFill>
           <a:ln>
             <a:noFill/>
@@ -4103,7 +4103,7 @@
             <a:r>
               <a:rPr sz="1800" b="1" i="0">
                 <a:solidFill>
-                  <a:srgbClr val="9E2E4A"/>
+                  <a:srgbClr val="721D32"/>
                 </a:solidFill>
               </a:rPr>
               <a:t>향후 계획</a:t>
@@ -4163,7 +4163,7 @@
     <p:bg>
       <p:bgPr>
         <a:solidFill>
-          <a:srgbClr val="D1617D"/>
+          <a:srgbClr val="DB3D65"/>
         </a:solidFill>
         <a:effectLst/>
       </p:bgPr>
@@ -4236,7 +4236,7 @@
             <a:r>
               <a:rPr sz="3000" b="1" i="0">
                 <a:solidFill>
-                  <a:srgbClr val="9E2E4A"/>
+                  <a:srgbClr val="721D32"/>
                 </a:solidFill>
               </a:rPr>
               <a:t>핵심 메시지</a:t>
@@ -4274,7 +4274,7 @@
             <a:r>
               <a:rPr sz="2600" b="1" i="0">
                 <a:solidFill>
-                  <a:srgbClr val="9E2E4A"/>
+                  <a:srgbClr val="721D32"/>
                 </a:solidFill>
               </a:rPr>
               <a:t>한 문장으로 말하면 — 여기에 핵심 메시지를 입력하세요</a:t>
@@ -4299,11 +4299,11 @@
             </a:avLst>
           </a:prstGeom>
           <a:solidFill>
-            <a:srgbClr val="FAEFF2"/>
+            <a:srgbClr val="FCF3F5"/>
           </a:solidFill>
           <a:ln w="15875">
             <a:solidFill>
-              <a:srgbClr val="F3CED7"/>
+              <a:srgbClr val="F7D4DD"/>
             </a:solidFill>
           </a:ln>
         </p:spPr>
@@ -4330,7 +4330,7 @@
             <a:avLst/>
           </a:prstGeom>
           <a:solidFill>
-            <a:srgbClr val="D1617D"/>
+            <a:srgbClr val="DB3D65"/>
           </a:solidFill>
           <a:ln>
             <a:noFill/>
@@ -4388,7 +4388,7 @@
             <a:r>
               <a:rPr sz="1800" b="1" i="0">
                 <a:solidFill>
-                  <a:srgbClr val="9E2E4A"/>
+                  <a:srgbClr val="721D32"/>
                 </a:solidFill>
               </a:rPr>
               <a:t>진행</a:t>
@@ -4466,11 +4466,11 @@
             </a:avLst>
           </a:prstGeom>
           <a:solidFill>
-            <a:srgbClr val="FAEFF2"/>
+            <a:srgbClr val="FCF3F5"/>
           </a:solidFill>
           <a:ln w="15875">
             <a:solidFill>
-              <a:srgbClr val="F3CED7"/>
+              <a:srgbClr val="F7D4DD"/>
             </a:solidFill>
           </a:ln>
         </p:spPr>
@@ -4497,7 +4497,7 @@
             <a:avLst/>
           </a:prstGeom>
           <a:solidFill>
-            <a:srgbClr val="D1617D"/>
+            <a:srgbClr val="DB3D65"/>
           </a:solidFill>
           <a:ln>
             <a:noFill/>
@@ -4555,7 +4555,7 @@
             <a:r>
               <a:rPr sz="1800" b="1" i="0">
                 <a:solidFill>
-                  <a:srgbClr val="9E2E4A"/>
+                  <a:srgbClr val="721D32"/>
                 </a:solidFill>
               </a:rPr>
               <a:t>성과</a:t>
@@ -4633,11 +4633,11 @@
             </a:avLst>
           </a:prstGeom>
           <a:solidFill>
-            <a:srgbClr val="FAEFF2"/>
+            <a:srgbClr val="FCF3F5"/>
           </a:solidFill>
           <a:ln w="15875">
             <a:solidFill>
-              <a:srgbClr val="F3CED7"/>
+              <a:srgbClr val="F7D4DD"/>
             </a:solidFill>
           </a:ln>
         </p:spPr>
@@ -4664,7 +4664,7 @@
             <a:avLst/>
           </a:prstGeom>
           <a:solidFill>
-            <a:srgbClr val="D1617D"/>
+            <a:srgbClr val="DB3D65"/>
           </a:solidFill>
           <a:ln>
             <a:noFill/>
@@ -4722,7 +4722,7 @@
             <a:r>
               <a:rPr sz="1800" b="1" i="0">
                 <a:solidFill>
-                  <a:srgbClr val="9E2E4A"/>
+                  <a:srgbClr val="721D32"/>
                 </a:solidFill>
               </a:rPr>
               <a:t>이슈</a:t>
@@ -4797,7 +4797,7 @@
     <p:bg>
       <p:bgPr>
         <a:solidFill>
-          <a:srgbClr val="D1617D"/>
+          <a:srgbClr val="DB3D65"/>
         </a:solidFill>
         <a:effectLst/>
       </p:bgPr>
@@ -4870,7 +4870,7 @@
             <a:r>
               <a:rPr sz="3000" b="1" i="0">
                 <a:solidFill>
-                  <a:srgbClr val="9E2E4A"/>
+                  <a:srgbClr val="721D32"/>
                 </a:solidFill>
               </a:rPr>
               <a:t>한눈에 비교</a:t>
@@ -4895,11 +4895,11 @@
             </a:avLst>
           </a:prstGeom>
           <a:solidFill>
-            <a:srgbClr val="FAEFF2"/>
+            <a:srgbClr val="FCF3F5"/>
           </a:solidFill>
           <a:ln w="12700">
             <a:solidFill>
-              <a:srgbClr val="F3CED7"/>
+              <a:srgbClr val="F7D4DD"/>
             </a:solidFill>
           </a:ln>
         </p:spPr>
@@ -4928,7 +4928,7 @@
             </a:avLst>
           </a:prstGeom>
           <a:solidFill>
-            <a:srgbClr val="D1617D"/>
+            <a:srgbClr val="DB3D65"/>
           </a:solidFill>
           <a:ln>
             <a:noFill/>
@@ -5080,11 +5080,11 @@
             </a:avLst>
           </a:prstGeom>
           <a:solidFill>
-            <a:srgbClr val="F3CED7"/>
+            <a:srgbClr val="F7D4DD"/>
           </a:solidFill>
           <a:ln w="12700">
             <a:solidFill>
-              <a:srgbClr val="F3CED7"/>
+              <a:srgbClr val="F7D4DD"/>
             </a:solidFill>
           </a:ln>
         </p:spPr>
@@ -5113,7 +5113,7 @@
             </a:avLst>
           </a:prstGeom>
           <a:solidFill>
-            <a:srgbClr val="9E2E4A"/>
+            <a:srgbClr val="721D32"/>
           </a:solidFill>
           <a:ln>
             <a:noFill/>
@@ -5262,7 +5262,7 @@
     <p:bg>
       <p:bgPr>
         <a:solidFill>
-          <a:srgbClr val="D1617D"/>
+          <a:srgbClr val="DB3D65"/>
         </a:solidFill>
         <a:effectLst/>
       </p:bgPr>
@@ -5335,7 +5335,7 @@
             <a:r>
               <a:rPr sz="3000" b="1" i="0">
                 <a:solidFill>
-                  <a:srgbClr val="9E2E4A"/>
+                  <a:srgbClr val="721D32"/>
                 </a:solidFill>
               </a:rPr>
               <a:t>일정·현황</a:t>
@@ -5387,30 +5387,30 @@
                   <a:tcPr anchor="ctr" marL="73152" marR="73152">
                     <a:lnL w="9525" cap="flat" cmpd="sng" algn="ctr">
                       <a:solidFill>
-                        <a:srgbClr val="D1617D"/>
+                        <a:srgbClr val="DB3D65"/>
                       </a:solidFill>
                       <a:prstDash val="solid"/>
                     </a:lnL>
                     <a:lnR w="9525" cap="flat" cmpd="sng" algn="ctr">
                       <a:solidFill>
-                        <a:srgbClr val="D1617D"/>
+                        <a:srgbClr val="DB3D65"/>
                       </a:solidFill>
                       <a:prstDash val="solid"/>
                     </a:lnR>
                     <a:lnT w="9525" cap="flat" cmpd="sng" algn="ctr">
                       <a:solidFill>
-                        <a:srgbClr val="D1617D"/>
+                        <a:srgbClr val="DB3D65"/>
                       </a:solidFill>
                       <a:prstDash val="solid"/>
                     </a:lnT>
                     <a:lnB w="9525" cap="flat" cmpd="sng" algn="ctr">
                       <a:solidFill>
-                        <a:srgbClr val="D1617D"/>
+                        <a:srgbClr val="DB3D65"/>
                       </a:solidFill>
                       <a:prstDash val="solid"/>
                     </a:lnB>
                     <a:solidFill>
-                      <a:srgbClr val="D1617D"/>
+                      <a:srgbClr val="DB3D65"/>
                     </a:solidFill>
                   </a:tcPr>
                 </a:tc>
@@ -5433,30 +5433,30 @@
                   <a:tcPr anchor="ctr" marL="73152" marR="73152">
                     <a:lnL w="9525" cap="flat" cmpd="sng" algn="ctr">
                       <a:solidFill>
-                        <a:srgbClr val="D1617D"/>
+                        <a:srgbClr val="DB3D65"/>
                       </a:solidFill>
                       <a:prstDash val="solid"/>
                     </a:lnL>
                     <a:lnR w="9525" cap="flat" cmpd="sng" algn="ctr">
                       <a:solidFill>
-                        <a:srgbClr val="D1617D"/>
+                        <a:srgbClr val="DB3D65"/>
                       </a:solidFill>
                       <a:prstDash val="solid"/>
                     </a:lnR>
                     <a:lnT w="9525" cap="flat" cmpd="sng" algn="ctr">
                       <a:solidFill>
-                        <a:srgbClr val="D1617D"/>
+                        <a:srgbClr val="DB3D65"/>
                       </a:solidFill>
                       <a:prstDash val="solid"/>
                     </a:lnT>
                     <a:lnB w="9525" cap="flat" cmpd="sng" algn="ctr">
                       <a:solidFill>
-                        <a:srgbClr val="D1617D"/>
+                        <a:srgbClr val="DB3D65"/>
                       </a:solidFill>
                       <a:prstDash val="solid"/>
                     </a:lnB>
                     <a:solidFill>
-                      <a:srgbClr val="D1617D"/>
+                      <a:srgbClr val="DB3D65"/>
                     </a:solidFill>
                   </a:tcPr>
                 </a:tc>
@@ -5479,30 +5479,30 @@
                   <a:tcPr anchor="ctr" marL="73152" marR="73152">
                     <a:lnL w="9525" cap="flat" cmpd="sng" algn="ctr">
                       <a:solidFill>
-                        <a:srgbClr val="D1617D"/>
+                        <a:srgbClr val="DB3D65"/>
                       </a:solidFill>
                       <a:prstDash val="solid"/>
                     </a:lnL>
                     <a:lnR w="9525" cap="flat" cmpd="sng" algn="ctr">
                       <a:solidFill>
-                        <a:srgbClr val="D1617D"/>
+                        <a:srgbClr val="DB3D65"/>
                       </a:solidFill>
                       <a:prstDash val="solid"/>
                     </a:lnR>
                     <a:lnT w="9525" cap="flat" cmpd="sng" algn="ctr">
                       <a:solidFill>
-                        <a:srgbClr val="D1617D"/>
+                        <a:srgbClr val="DB3D65"/>
                       </a:solidFill>
                       <a:prstDash val="solid"/>
                     </a:lnT>
                     <a:lnB w="9525" cap="flat" cmpd="sng" algn="ctr">
                       <a:solidFill>
-                        <a:srgbClr val="D1617D"/>
+                        <a:srgbClr val="DB3D65"/>
                       </a:solidFill>
                       <a:prstDash val="solid"/>
                     </a:lnB>
                     <a:solidFill>
-                      <a:srgbClr val="D1617D"/>
+                      <a:srgbClr val="DB3D65"/>
                     </a:solidFill>
                   </a:tcPr>
                 </a:tc>
@@ -5525,30 +5525,30 @@
                   <a:tcPr anchor="ctr" marL="73152" marR="73152">
                     <a:lnL w="9525" cap="flat" cmpd="sng" algn="ctr">
                       <a:solidFill>
-                        <a:srgbClr val="D1617D"/>
+                        <a:srgbClr val="DB3D65"/>
                       </a:solidFill>
                       <a:prstDash val="solid"/>
                     </a:lnL>
                     <a:lnR w="9525" cap="flat" cmpd="sng" algn="ctr">
                       <a:solidFill>
-                        <a:srgbClr val="D1617D"/>
+                        <a:srgbClr val="DB3D65"/>
                       </a:solidFill>
                       <a:prstDash val="solid"/>
                     </a:lnR>
                     <a:lnT w="9525" cap="flat" cmpd="sng" algn="ctr">
                       <a:solidFill>
-                        <a:srgbClr val="D1617D"/>
+                        <a:srgbClr val="DB3D65"/>
                       </a:solidFill>
                       <a:prstDash val="solid"/>
                     </a:lnT>
                     <a:lnB w="9525" cap="flat" cmpd="sng" algn="ctr">
                       <a:solidFill>
-                        <a:srgbClr val="D1617D"/>
+                        <a:srgbClr val="DB3D65"/>
                       </a:solidFill>
                       <a:prstDash val="solid"/>
                     </a:lnB>
                     <a:solidFill>
-                      <a:srgbClr val="D1617D"/>
+                      <a:srgbClr val="DB3D65"/>
                     </a:solidFill>
                   </a:tcPr>
                 </a:tc>
@@ -5563,7 +5563,7 @@
                       <a:r>
                         <a:rPr sz="1500" b="1">
                           <a:solidFill>
-                            <a:srgbClr val="9E2E4A"/>
+                            <a:srgbClr val="721D32"/>
                           </a:solidFill>
                         </a:rPr>
                         <a:t>1</a:t>
@@ -5573,30 +5573,30 @@
                   <a:tcPr anchor="ctr" marL="73152" marR="73152">
                     <a:lnL w="9525" cap="flat" cmpd="sng" algn="ctr">
                       <a:solidFill>
-                        <a:srgbClr val="F3CED7"/>
+                        <a:srgbClr val="F7D4DD"/>
                       </a:solidFill>
                       <a:prstDash val="solid"/>
                     </a:lnL>
                     <a:lnR w="9525" cap="flat" cmpd="sng" algn="ctr">
                       <a:solidFill>
-                        <a:srgbClr val="F3CED7"/>
+                        <a:srgbClr val="F7D4DD"/>
                       </a:solidFill>
                       <a:prstDash val="solid"/>
                     </a:lnR>
                     <a:lnT w="9525" cap="flat" cmpd="sng" algn="ctr">
                       <a:solidFill>
-                        <a:srgbClr val="F3CED7"/>
+                        <a:srgbClr val="F7D4DD"/>
                       </a:solidFill>
                       <a:prstDash val="solid"/>
                     </a:lnT>
                     <a:lnB w="9525" cap="flat" cmpd="sng" algn="ctr">
                       <a:solidFill>
-                        <a:srgbClr val="F3CED7"/>
+                        <a:srgbClr val="F7D4DD"/>
                       </a:solidFill>
                       <a:prstDash val="solid"/>
                     </a:lnB>
                     <a:solidFill>
-                      <a:srgbClr val="F3CED7"/>
+                      <a:srgbClr val="F7D4DD"/>
                     </a:solidFill>
                   </a:tcPr>
                 </a:tc>
@@ -5619,25 +5619,25 @@
                   <a:tcPr anchor="ctr" marL="73152" marR="73152">
                     <a:lnL w="9525" cap="flat" cmpd="sng" algn="ctr">
                       <a:solidFill>
-                        <a:srgbClr val="F3CED7"/>
+                        <a:srgbClr val="F7D4DD"/>
                       </a:solidFill>
                       <a:prstDash val="solid"/>
                     </a:lnL>
                     <a:lnR w="9525" cap="flat" cmpd="sng" algn="ctr">
                       <a:solidFill>
-                        <a:srgbClr val="F3CED7"/>
+                        <a:srgbClr val="F7D4DD"/>
                       </a:solidFill>
                       <a:prstDash val="solid"/>
                     </a:lnR>
                     <a:lnT w="9525" cap="flat" cmpd="sng" algn="ctr">
                       <a:solidFill>
-                        <a:srgbClr val="F3CED7"/>
+                        <a:srgbClr val="F7D4DD"/>
                       </a:solidFill>
                       <a:prstDash val="solid"/>
                     </a:lnT>
                     <a:lnB w="9525" cap="flat" cmpd="sng" algn="ctr">
                       <a:solidFill>
-                        <a:srgbClr val="F3CED7"/>
+                        <a:srgbClr val="F7D4DD"/>
                       </a:solidFill>
                       <a:prstDash val="solid"/>
                     </a:lnB>
@@ -5665,25 +5665,25 @@
                   <a:tcPr anchor="ctr" marL="73152" marR="73152">
                     <a:lnL w="9525" cap="flat" cmpd="sng" algn="ctr">
                       <a:solidFill>
-                        <a:srgbClr val="F3CED7"/>
+                        <a:srgbClr val="F7D4DD"/>
                       </a:solidFill>
                       <a:prstDash val="solid"/>
                     </a:lnL>
                     <a:lnR w="9525" cap="flat" cmpd="sng" algn="ctr">
                       <a:solidFill>
-                        <a:srgbClr val="F3CED7"/>
+                        <a:srgbClr val="F7D4DD"/>
                       </a:solidFill>
                       <a:prstDash val="solid"/>
                     </a:lnR>
                     <a:lnT w="9525" cap="flat" cmpd="sng" algn="ctr">
                       <a:solidFill>
-                        <a:srgbClr val="F3CED7"/>
+                        <a:srgbClr val="F7D4DD"/>
                       </a:solidFill>
                       <a:prstDash val="solid"/>
                     </a:lnT>
                     <a:lnB w="9525" cap="flat" cmpd="sng" algn="ctr">
                       <a:solidFill>
-                        <a:srgbClr val="F3CED7"/>
+                        <a:srgbClr val="F7D4DD"/>
                       </a:solidFill>
                       <a:prstDash val="solid"/>
                     </a:lnB>
@@ -5711,25 +5711,25 @@
                   <a:tcPr anchor="ctr" marL="73152" marR="73152">
                     <a:lnL w="9525" cap="flat" cmpd="sng" algn="ctr">
                       <a:solidFill>
-                        <a:srgbClr val="F3CED7"/>
+                        <a:srgbClr val="F7D4DD"/>
                       </a:solidFill>
                       <a:prstDash val="solid"/>
                     </a:lnL>
                     <a:lnR w="9525" cap="flat" cmpd="sng" algn="ctr">
                       <a:solidFill>
-                        <a:srgbClr val="F3CED7"/>
+                        <a:srgbClr val="F7D4DD"/>
                       </a:solidFill>
                       <a:prstDash val="solid"/>
                     </a:lnR>
                     <a:lnT w="9525" cap="flat" cmpd="sng" algn="ctr">
                       <a:solidFill>
-                        <a:srgbClr val="F3CED7"/>
+                        <a:srgbClr val="F7D4DD"/>
                       </a:solidFill>
                       <a:prstDash val="solid"/>
                     </a:lnT>
                     <a:lnB w="9525" cap="flat" cmpd="sng" algn="ctr">
                       <a:solidFill>
-                        <a:srgbClr val="F3CED7"/>
+                        <a:srgbClr val="F7D4DD"/>
                       </a:solidFill>
                       <a:prstDash val="solid"/>
                     </a:lnB>
@@ -5749,7 +5749,7 @@
                       <a:r>
                         <a:rPr sz="1500" b="1">
                           <a:solidFill>
-                            <a:srgbClr val="9E2E4A"/>
+                            <a:srgbClr val="721D32"/>
                           </a:solidFill>
                         </a:rPr>
                         <a:t>2</a:t>
@@ -5759,30 +5759,30 @@
                   <a:tcPr anchor="ctr" marL="73152" marR="73152">
                     <a:lnL w="9525" cap="flat" cmpd="sng" algn="ctr">
                       <a:solidFill>
-                        <a:srgbClr val="F3CED7"/>
+                        <a:srgbClr val="F7D4DD"/>
                       </a:solidFill>
                       <a:prstDash val="solid"/>
                     </a:lnL>
                     <a:lnR w="9525" cap="flat" cmpd="sng" algn="ctr">
                       <a:solidFill>
-                        <a:srgbClr val="F3CED7"/>
+                        <a:srgbClr val="F7D4DD"/>
                       </a:solidFill>
                       <a:prstDash val="solid"/>
                     </a:lnR>
                     <a:lnT w="9525" cap="flat" cmpd="sng" algn="ctr">
                       <a:solidFill>
-                        <a:srgbClr val="F3CED7"/>
+                        <a:srgbClr val="F7D4DD"/>
                       </a:solidFill>
                       <a:prstDash val="solid"/>
                     </a:lnT>
                     <a:lnB w="9525" cap="flat" cmpd="sng" algn="ctr">
                       <a:solidFill>
-                        <a:srgbClr val="F3CED7"/>
+                        <a:srgbClr val="F7D4DD"/>
                       </a:solidFill>
                       <a:prstDash val="solid"/>
                     </a:lnB>
                     <a:solidFill>
-                      <a:srgbClr val="F3CED7"/>
+                      <a:srgbClr val="F7D4DD"/>
                     </a:solidFill>
                   </a:tcPr>
                 </a:tc>
@@ -5805,30 +5805,30 @@
                   <a:tcPr anchor="ctr" marL="73152" marR="73152">
                     <a:lnL w="9525" cap="flat" cmpd="sng" algn="ctr">
                       <a:solidFill>
-                        <a:srgbClr val="F3CED7"/>
+                        <a:srgbClr val="F7D4DD"/>
                       </a:solidFill>
                       <a:prstDash val="solid"/>
                     </a:lnL>
                     <a:lnR w="9525" cap="flat" cmpd="sng" algn="ctr">
                       <a:solidFill>
-                        <a:srgbClr val="F3CED7"/>
+                        <a:srgbClr val="F7D4DD"/>
                       </a:solidFill>
                       <a:prstDash val="solid"/>
                     </a:lnR>
                     <a:lnT w="9525" cap="flat" cmpd="sng" algn="ctr">
                       <a:solidFill>
-                        <a:srgbClr val="F3CED7"/>
+                        <a:srgbClr val="F7D4DD"/>
                       </a:solidFill>
                       <a:prstDash val="solid"/>
                     </a:lnT>
                     <a:lnB w="9525" cap="flat" cmpd="sng" algn="ctr">
                       <a:solidFill>
-                        <a:srgbClr val="F3CED7"/>
+                        <a:srgbClr val="F7D4DD"/>
                       </a:solidFill>
                       <a:prstDash val="solid"/>
                     </a:lnB>
                     <a:solidFill>
-                      <a:srgbClr val="FAEFF2"/>
+                      <a:srgbClr val="FCF3F5"/>
                     </a:solidFill>
                   </a:tcPr>
                 </a:tc>
@@ -5851,30 +5851,30 @@
                   <a:tcPr anchor="ctr" marL="73152" marR="73152">
                     <a:lnL w="9525" cap="flat" cmpd="sng" algn="ctr">
                       <a:solidFill>
-                        <a:srgbClr val="F3CED7"/>
+                        <a:srgbClr val="F7D4DD"/>
                       </a:solidFill>
                       <a:prstDash val="solid"/>
                     </a:lnL>
                     <a:lnR w="9525" cap="flat" cmpd="sng" algn="ctr">
                       <a:solidFill>
-                        <a:srgbClr val="F3CED7"/>
+                        <a:srgbClr val="F7D4DD"/>
                       </a:solidFill>
                       <a:prstDash val="solid"/>
                     </a:lnR>
                     <a:lnT w="9525" cap="flat" cmpd="sng" algn="ctr">
                       <a:solidFill>
-                        <a:srgbClr val="F3CED7"/>
+                        <a:srgbClr val="F7D4DD"/>
                       </a:solidFill>
                       <a:prstDash val="solid"/>
                     </a:lnT>
                     <a:lnB w="9525" cap="flat" cmpd="sng" algn="ctr">
                       <a:solidFill>
-                        <a:srgbClr val="F3CED7"/>
+                        <a:srgbClr val="F7D4DD"/>
                       </a:solidFill>
                       <a:prstDash val="solid"/>
                     </a:lnB>
                     <a:solidFill>
-                      <a:srgbClr val="FAEFF2"/>
+                      <a:srgbClr val="FCF3F5"/>
                     </a:solidFill>
                   </a:tcPr>
                 </a:tc>
@@ -5897,30 +5897,30 @@
                   <a:tcPr anchor="ctr" marL="73152" marR="73152">
                     <a:lnL w="9525" cap="flat" cmpd="sng" algn="ctr">
                       <a:solidFill>
-                        <a:srgbClr val="F3CED7"/>
+                        <a:srgbClr val="F7D4DD"/>
                       </a:solidFill>
                       <a:prstDash val="solid"/>
                     </a:lnL>
                     <a:lnR w="9525" cap="flat" cmpd="sng" algn="ctr">
                       <a:solidFill>
-                        <a:srgbClr val="F3CED7"/>
+                        <a:srgbClr val="F7D4DD"/>
                       </a:solidFill>
                       <a:prstDash val="solid"/>
                     </a:lnR>
                     <a:lnT w="9525" cap="flat" cmpd="sng" algn="ctr">
                       <a:solidFill>
-                        <a:srgbClr val="F3CED7"/>
+                        <a:srgbClr val="F7D4DD"/>
                       </a:solidFill>
                       <a:prstDash val="solid"/>
                     </a:lnT>
                     <a:lnB w="9525" cap="flat" cmpd="sng" algn="ctr">
                       <a:solidFill>
-                        <a:srgbClr val="F3CED7"/>
+                        <a:srgbClr val="F7D4DD"/>
                       </a:solidFill>
                       <a:prstDash val="solid"/>
                     </a:lnB>
                     <a:solidFill>
-                      <a:srgbClr val="FAEFF2"/>
+                      <a:srgbClr val="FCF3F5"/>
                     </a:solidFill>
                   </a:tcPr>
                 </a:tc>
@@ -5935,7 +5935,7 @@
                       <a:r>
                         <a:rPr sz="1500" b="1">
                           <a:solidFill>
-                            <a:srgbClr val="9E2E4A"/>
+                            <a:srgbClr val="721D32"/>
                           </a:solidFill>
                         </a:rPr>
                         <a:t>3</a:t>
@@ -5945,30 +5945,30 @@
                   <a:tcPr anchor="ctr" marL="73152" marR="73152">
                     <a:lnL w="9525" cap="flat" cmpd="sng" algn="ctr">
                       <a:solidFill>
-                        <a:srgbClr val="F3CED7"/>
+                        <a:srgbClr val="F7D4DD"/>
                       </a:solidFill>
                       <a:prstDash val="solid"/>
                     </a:lnL>
                     <a:lnR w="9525" cap="flat" cmpd="sng" algn="ctr">
                       <a:solidFill>
-                        <a:srgbClr val="F3CED7"/>
+                        <a:srgbClr val="F7D4DD"/>
                       </a:solidFill>
                       <a:prstDash val="solid"/>
                     </a:lnR>
                     <a:lnT w="9525" cap="flat" cmpd="sng" algn="ctr">
                       <a:solidFill>
-                        <a:srgbClr val="F3CED7"/>
+                        <a:srgbClr val="F7D4DD"/>
                       </a:solidFill>
                       <a:prstDash val="solid"/>
                     </a:lnT>
                     <a:lnB w="9525" cap="flat" cmpd="sng" algn="ctr">
                       <a:solidFill>
-                        <a:srgbClr val="F3CED7"/>
+                        <a:srgbClr val="F7D4DD"/>
                       </a:solidFill>
                       <a:prstDash val="solid"/>
                     </a:lnB>
                     <a:solidFill>
-                      <a:srgbClr val="F3CED7"/>
+                      <a:srgbClr val="F7D4DD"/>
                     </a:solidFill>
                   </a:tcPr>
                 </a:tc>
@@ -5991,25 +5991,25 @@
                   <a:tcPr anchor="ctr" marL="73152" marR="73152">
                     <a:lnL w="9525" cap="flat" cmpd="sng" algn="ctr">
                       <a:solidFill>
-                        <a:srgbClr val="F3CED7"/>
+                        <a:srgbClr val="F7D4DD"/>
                       </a:solidFill>
                       <a:prstDash val="solid"/>
                     </a:lnL>
                     <a:lnR w="9525" cap="flat" cmpd="sng" algn="ctr">
                       <a:solidFill>
-                        <a:srgbClr val="F3CED7"/>
+                        <a:srgbClr val="F7D4DD"/>
                       </a:solidFill>
                       <a:prstDash val="solid"/>
                     </a:lnR>
                     <a:lnT w="9525" cap="flat" cmpd="sng" algn="ctr">
                       <a:solidFill>
-                        <a:srgbClr val="F3CED7"/>
+                        <a:srgbClr val="F7D4DD"/>
                       </a:solidFill>
                       <a:prstDash val="solid"/>
                     </a:lnT>
                     <a:lnB w="9525" cap="flat" cmpd="sng" algn="ctr">
                       <a:solidFill>
-                        <a:srgbClr val="F3CED7"/>
+                        <a:srgbClr val="F7D4DD"/>
                       </a:solidFill>
                       <a:prstDash val="solid"/>
                     </a:lnB>
@@ -6037,25 +6037,25 @@
                   <a:tcPr anchor="ctr" marL="73152" marR="73152">
                     <a:lnL w="9525" cap="flat" cmpd="sng" algn="ctr">
                       <a:solidFill>
-                        <a:srgbClr val="F3CED7"/>
+                        <a:srgbClr val="F7D4DD"/>
                       </a:solidFill>
                       <a:prstDash val="solid"/>
                     </a:lnL>
                     <a:lnR w="9525" cap="flat" cmpd="sng" algn="ctr">
                       <a:solidFill>
-                        <a:srgbClr val="F3CED7"/>
+                        <a:srgbClr val="F7D4DD"/>
                       </a:solidFill>
                       <a:prstDash val="solid"/>
                     </a:lnR>
                     <a:lnT w="9525" cap="flat" cmpd="sng" algn="ctr">
                       <a:solidFill>
-                        <a:srgbClr val="F3CED7"/>
+                        <a:srgbClr val="F7D4DD"/>
                       </a:solidFill>
                       <a:prstDash val="solid"/>
                     </a:lnT>
                     <a:lnB w="9525" cap="flat" cmpd="sng" algn="ctr">
                       <a:solidFill>
-                        <a:srgbClr val="F3CED7"/>
+                        <a:srgbClr val="F7D4DD"/>
                       </a:solidFill>
                       <a:prstDash val="solid"/>
                     </a:lnB>
@@ -6083,25 +6083,25 @@
                   <a:tcPr anchor="ctr" marL="73152" marR="73152">
                     <a:lnL w="9525" cap="flat" cmpd="sng" algn="ctr">
                       <a:solidFill>
-                        <a:srgbClr val="F3CED7"/>
+                        <a:srgbClr val="F7D4DD"/>
                       </a:solidFill>
                       <a:prstDash val="solid"/>
                     </a:lnL>
                     <a:lnR w="9525" cap="flat" cmpd="sng" algn="ctr">
                       <a:solidFill>
-                        <a:srgbClr val="F3CED7"/>
+                        <a:srgbClr val="F7D4DD"/>
                       </a:solidFill>
                       <a:prstDash val="solid"/>
                     </a:lnR>
                     <a:lnT w="9525" cap="flat" cmpd="sng" algn="ctr">
                       <a:solidFill>
-                        <a:srgbClr val="F3CED7"/>
+                        <a:srgbClr val="F7D4DD"/>
                       </a:solidFill>
                       <a:prstDash val="solid"/>
                     </a:lnT>
                     <a:lnB w="9525" cap="flat" cmpd="sng" algn="ctr">
                       <a:solidFill>
-                        <a:srgbClr val="F3CED7"/>
+                        <a:srgbClr val="F7D4DD"/>
                       </a:solidFill>
                       <a:prstDash val="solid"/>
                     </a:lnB>
@@ -6121,7 +6121,7 @@
                       <a:r>
                         <a:rPr sz="1500" b="1">
                           <a:solidFill>
-                            <a:srgbClr val="9E2E4A"/>
+                            <a:srgbClr val="721D32"/>
                           </a:solidFill>
                         </a:rPr>
                         <a:t>4</a:t>
@@ -6131,30 +6131,30 @@
                   <a:tcPr anchor="ctr" marL="73152" marR="73152">
                     <a:lnL w="9525" cap="flat" cmpd="sng" algn="ctr">
                       <a:solidFill>
-                        <a:srgbClr val="F3CED7"/>
+                        <a:srgbClr val="F7D4DD"/>
                       </a:solidFill>
                       <a:prstDash val="solid"/>
                     </a:lnL>
                     <a:lnR w="9525" cap="flat" cmpd="sng" algn="ctr">
                       <a:solidFill>
-                        <a:srgbClr val="F3CED7"/>
+                        <a:srgbClr val="F7D4DD"/>
                       </a:solidFill>
                       <a:prstDash val="solid"/>
                     </a:lnR>
                     <a:lnT w="9525" cap="flat" cmpd="sng" algn="ctr">
                       <a:solidFill>
-                        <a:srgbClr val="F3CED7"/>
+                        <a:srgbClr val="F7D4DD"/>
                       </a:solidFill>
                       <a:prstDash val="solid"/>
                     </a:lnT>
                     <a:lnB w="9525" cap="flat" cmpd="sng" algn="ctr">
                       <a:solidFill>
-                        <a:srgbClr val="F3CED7"/>
+                        <a:srgbClr val="F7D4DD"/>
                       </a:solidFill>
                       <a:prstDash val="solid"/>
                     </a:lnB>
                     <a:solidFill>
-                      <a:srgbClr val="F3CED7"/>
+                      <a:srgbClr val="F7D4DD"/>
                     </a:solidFill>
                   </a:tcPr>
                 </a:tc>
@@ -6177,30 +6177,30 @@
                   <a:tcPr anchor="ctr" marL="73152" marR="73152">
                     <a:lnL w="9525" cap="flat" cmpd="sng" algn="ctr">
                       <a:solidFill>
-                        <a:srgbClr val="F3CED7"/>
+                        <a:srgbClr val="F7D4DD"/>
                       </a:solidFill>
                       <a:prstDash val="solid"/>
                     </a:lnL>
                     <a:lnR w="9525" cap="flat" cmpd="sng" algn="ctr">
                       <a:solidFill>
-                        <a:srgbClr val="F3CED7"/>
+                        <a:srgbClr val="F7D4DD"/>
                       </a:solidFill>
                       <a:prstDash val="solid"/>
                     </a:lnR>
                     <a:lnT w="9525" cap="flat" cmpd="sng" algn="ctr">
                       <a:solidFill>
-                        <a:srgbClr val="F3CED7"/>
+                        <a:srgbClr val="F7D4DD"/>
                       </a:solidFill>
                       <a:prstDash val="solid"/>
                     </a:lnT>
                     <a:lnB w="9525" cap="flat" cmpd="sng" algn="ctr">
                       <a:solidFill>
-                        <a:srgbClr val="F3CED7"/>
+                        <a:srgbClr val="F7D4DD"/>
                       </a:solidFill>
                       <a:prstDash val="solid"/>
                     </a:lnB>
                     <a:solidFill>
-                      <a:srgbClr val="FAEFF2"/>
+                      <a:srgbClr val="FCF3F5"/>
                     </a:solidFill>
                   </a:tcPr>
                 </a:tc>
@@ -6223,30 +6223,30 @@
                   <a:tcPr anchor="ctr" marL="73152" marR="73152">
                     <a:lnL w="9525" cap="flat" cmpd="sng" algn="ctr">
                       <a:solidFill>
-                        <a:srgbClr val="F3CED7"/>
+                        <a:srgbClr val="F7D4DD"/>
                       </a:solidFill>
                       <a:prstDash val="solid"/>
                     </a:lnL>
                     <a:lnR w="9525" cap="flat" cmpd="sng" algn="ctr">
                       <a:solidFill>
-                        <a:srgbClr val="F3CED7"/>
+                        <a:srgbClr val="F7D4DD"/>
                       </a:solidFill>
                       <a:prstDash val="solid"/>
                     </a:lnR>
                     <a:lnT w="9525" cap="flat" cmpd="sng" algn="ctr">
                       <a:solidFill>
-                        <a:srgbClr val="F3CED7"/>
+                        <a:srgbClr val="F7D4DD"/>
                       </a:solidFill>
                       <a:prstDash val="solid"/>
                     </a:lnT>
                     <a:lnB w="9525" cap="flat" cmpd="sng" algn="ctr">
                       <a:solidFill>
-                        <a:srgbClr val="F3CED7"/>
+                        <a:srgbClr val="F7D4DD"/>
                       </a:solidFill>
                       <a:prstDash val="solid"/>
                     </a:lnB>
                     <a:solidFill>
-                      <a:srgbClr val="FAEFF2"/>
+                      <a:srgbClr val="FCF3F5"/>
                     </a:solidFill>
                   </a:tcPr>
                 </a:tc>
@@ -6269,30 +6269,30 @@
                   <a:tcPr anchor="ctr" marL="73152" marR="73152">
                     <a:lnL w="9525" cap="flat" cmpd="sng" algn="ctr">
                       <a:solidFill>
-                        <a:srgbClr val="F3CED7"/>
+                        <a:srgbClr val="F7D4DD"/>
                       </a:solidFill>
                       <a:prstDash val="solid"/>
                     </a:lnL>
                     <a:lnR w="9525" cap="flat" cmpd="sng" algn="ctr">
                       <a:solidFill>
-                        <a:srgbClr val="F3CED7"/>
+                        <a:srgbClr val="F7D4DD"/>
                       </a:solidFill>
                       <a:prstDash val="solid"/>
                     </a:lnR>
                     <a:lnT w="9525" cap="flat" cmpd="sng" algn="ctr">
                       <a:solidFill>
-                        <a:srgbClr val="F3CED7"/>
+                        <a:srgbClr val="F7D4DD"/>
                       </a:solidFill>
                       <a:prstDash val="solid"/>
                     </a:lnT>
                     <a:lnB w="9525" cap="flat" cmpd="sng" algn="ctr">
                       <a:solidFill>
-                        <a:srgbClr val="F3CED7"/>
+                        <a:srgbClr val="F7D4DD"/>
                       </a:solidFill>
                       <a:prstDash val="solid"/>
                     </a:lnB>
                     <a:solidFill>
-                      <a:srgbClr val="FAEFF2"/>
+                      <a:srgbClr val="FCF3F5"/>
                     </a:solidFill>
                   </a:tcPr>
                 </a:tc>
@@ -6307,7 +6307,7 @@
                       <a:r>
                         <a:rPr sz="1500" b="1">
                           <a:solidFill>
-                            <a:srgbClr val="9E2E4A"/>
+                            <a:srgbClr val="721D32"/>
                           </a:solidFill>
                         </a:rPr>
                         <a:t>5</a:t>
@@ -6317,30 +6317,30 @@
                   <a:tcPr anchor="ctr" marL="73152" marR="73152">
                     <a:lnL w="9525" cap="flat" cmpd="sng" algn="ctr">
                       <a:solidFill>
-                        <a:srgbClr val="F3CED7"/>
+                        <a:srgbClr val="F7D4DD"/>
                       </a:solidFill>
                       <a:prstDash val="solid"/>
                     </a:lnL>
                     <a:lnR w="9525" cap="flat" cmpd="sng" algn="ctr">
                       <a:solidFill>
-                        <a:srgbClr val="F3CED7"/>
+                        <a:srgbClr val="F7D4DD"/>
                       </a:solidFill>
                       <a:prstDash val="solid"/>
                     </a:lnR>
                     <a:lnT w="9525" cap="flat" cmpd="sng" algn="ctr">
                       <a:solidFill>
-                        <a:srgbClr val="F3CED7"/>
+                        <a:srgbClr val="F7D4DD"/>
                       </a:solidFill>
                       <a:prstDash val="solid"/>
                     </a:lnT>
                     <a:lnB w="9525" cap="flat" cmpd="sng" algn="ctr">
                       <a:solidFill>
-                        <a:srgbClr val="F3CED7"/>
+                        <a:srgbClr val="F7D4DD"/>
                       </a:solidFill>
                       <a:prstDash val="solid"/>
                     </a:lnB>
                     <a:solidFill>
-                      <a:srgbClr val="F3CED7"/>
+                      <a:srgbClr val="F7D4DD"/>
                     </a:solidFill>
                   </a:tcPr>
                 </a:tc>
@@ -6363,25 +6363,25 @@
                   <a:tcPr anchor="ctr" marL="73152" marR="73152">
                     <a:lnL w="9525" cap="flat" cmpd="sng" algn="ctr">
                       <a:solidFill>
-                        <a:srgbClr val="F3CED7"/>
+                        <a:srgbClr val="F7D4DD"/>
                       </a:solidFill>
                       <a:prstDash val="solid"/>
                     </a:lnL>
                     <a:lnR w="9525" cap="flat" cmpd="sng" algn="ctr">
                       <a:solidFill>
-                        <a:srgbClr val="F3CED7"/>
+                        <a:srgbClr val="F7D4DD"/>
                       </a:solidFill>
                       <a:prstDash val="solid"/>
                     </a:lnR>
                     <a:lnT w="9525" cap="flat" cmpd="sng" algn="ctr">
                       <a:solidFill>
-                        <a:srgbClr val="F3CED7"/>
+                        <a:srgbClr val="F7D4DD"/>
                       </a:solidFill>
                       <a:prstDash val="solid"/>
                     </a:lnT>
                     <a:lnB w="9525" cap="flat" cmpd="sng" algn="ctr">
                       <a:solidFill>
-                        <a:srgbClr val="F3CED7"/>
+                        <a:srgbClr val="F7D4DD"/>
                       </a:solidFill>
                       <a:prstDash val="solid"/>
                     </a:lnB>
@@ -6409,25 +6409,25 @@
                   <a:tcPr anchor="ctr" marL="73152" marR="73152">
                     <a:lnL w="9525" cap="flat" cmpd="sng" algn="ctr">
                       <a:solidFill>
-                        <a:srgbClr val="F3CED7"/>
+                        <a:srgbClr val="F7D4DD"/>
                       </a:solidFill>
                       <a:prstDash val="solid"/>
                     </a:lnL>
                     <a:lnR w="9525" cap="flat" cmpd="sng" algn="ctr">
                       <a:solidFill>
-                        <a:srgbClr val="F3CED7"/>
+                        <a:srgbClr val="F7D4DD"/>
                       </a:solidFill>
                       <a:prstDash val="solid"/>
                     </a:lnR>
                     <a:lnT w="9525" cap="flat" cmpd="sng" algn="ctr">
                       <a:solidFill>
-                        <a:srgbClr val="F3CED7"/>
+                        <a:srgbClr val="F7D4DD"/>
                       </a:solidFill>
                       <a:prstDash val="solid"/>
                     </a:lnT>
                     <a:lnB w="9525" cap="flat" cmpd="sng" algn="ctr">
                       <a:solidFill>
-                        <a:srgbClr val="F3CED7"/>
+                        <a:srgbClr val="F7D4DD"/>
                       </a:solidFill>
                       <a:prstDash val="solid"/>
                     </a:lnB>
@@ -6455,25 +6455,25 @@
                   <a:tcPr anchor="ctr" marL="73152" marR="73152">
                     <a:lnL w="9525" cap="flat" cmpd="sng" algn="ctr">
                       <a:solidFill>
-                        <a:srgbClr val="F3CED7"/>
+                        <a:srgbClr val="F7D4DD"/>
                       </a:solidFill>
                       <a:prstDash val="solid"/>
                     </a:lnL>
                     <a:lnR w="9525" cap="flat" cmpd="sng" algn="ctr">
                       <a:solidFill>
-                        <a:srgbClr val="F3CED7"/>
+                        <a:srgbClr val="F7D4DD"/>
                       </a:solidFill>
                       <a:prstDash val="solid"/>
                     </a:lnR>
                     <a:lnT w="9525" cap="flat" cmpd="sng" algn="ctr">
                       <a:solidFill>
-                        <a:srgbClr val="F3CED7"/>
+                        <a:srgbClr val="F7D4DD"/>
                       </a:solidFill>
                       <a:prstDash val="solid"/>
                     </a:lnT>
                     <a:lnB w="9525" cap="flat" cmpd="sng" algn="ctr">
                       <a:solidFill>
-                        <a:srgbClr val="F3CED7"/>
+                        <a:srgbClr val="F7D4DD"/>
                       </a:solidFill>
                       <a:prstDash val="solid"/>
                     </a:lnB>
@@ -6559,7 +6559,7 @@
             <a:r>
               <a:rPr sz="3600" b="1" i="0">
                 <a:solidFill>
-                  <a:srgbClr val="9E2E4A"/>
+                  <a:srgbClr val="721D32"/>
                 </a:solidFill>
               </a:rPr>
               <a:t>감사합니다</a:t>
@@ -6597,7 +6597,7 @@
             <a:r>
               <a:rPr sz="1700" b="0" i="1">
                 <a:solidFill>
-                  <a:srgbClr val="9E2E4A"/>
+                  <a:srgbClr val="721D32"/>
                 </a:solidFill>
               </a:rPr>
               <a:t>끝까지 들어 주셔서 고맙습니다</a:t>
@@ -6662,34 +6662,34 @@
         <a:sysClr val="window" lastClr="FFFFFF"/>
       </a:lt1>
       <a:dk2>
-        <a:srgbClr val="9E2E4A"/>
+        <a:srgbClr val="721D32"/>
       </a:dk2>
       <a:lt2>
-        <a:srgbClr val="FAEFF2"/>
+        <a:srgbClr val="FCF3F5"/>
       </a:lt2>
       <a:accent1>
-        <a:srgbClr val="D1617D"/>
+        <a:srgbClr val="DB3D65"/>
       </a:accent1>
       <a:accent2>
-        <a:srgbClr val="3B9151"/>
+        <a:srgbClr val="339941"/>
       </a:accent2>
       <a:accent3>
-        <a:srgbClr val="9E2E4A"/>
+        <a:srgbClr val="721D32"/>
       </a:accent3>
       <a:accent4>
-        <a:srgbClr val="F3CED7"/>
+        <a:srgbClr val="F7D4DD"/>
       </a:accent4>
       <a:accent5>
-        <a:srgbClr val="867967"/>
+        <a:srgbClr val="876B53"/>
       </a:accent5>
       <a:accent6>
-        <a:srgbClr val="C58292"/>
+        <a:srgbClr val="AA7784"/>
       </a:accent6>
       <a:hlink>
-        <a:srgbClr val="D1617D"/>
+        <a:srgbClr val="DB3D65"/>
       </a:hlink>
       <a:folHlink>
-        <a:srgbClr val="9E2E4A"/>
+        <a:srgbClr val="721D32"/>
       </a:folHlink>
     </a:clrScheme>
     <a:fontScheme name="Office">
